--- a/public/level3/downloads/slides/Level3_Lesson3_Slides.pptx
+++ b/public/level3/downloads/slides/Level3_Lesson3_Slides.pptx
@@ -1510,7 +1510,7 @@
           </a:p>
           <a:p>
             <a:r>
-              <a:t>The audio (about 1:20) is coming soon. When it is ready, it plays the conversation once; press play again for play 2. Until then, read the listening script (at the end of these notes) with a volunteer.</a:t>
+              <a:t>The audio (L3_L3_listening.mp3, about 1:15) plays the conversation once. Press play again for play 2. A third play is fine if the class needs it.</a:t>
             </a:r>
           </a:p>
           <a:p>
@@ -1520,7 +1520,7 @@
           </a:p>
           <a:p>
             <a:r>
-              <a:t>Audio: the listening audio for this lesson (about 1:20) is coming soon. It will use computer-generated voices (Chatterbox TTS cloned from synthetic Kokoro-82M reference clips); no recordings of real people. Until it is ready, read the listening script (in the notes of the Before You Listen slide) with a volunteer. The names and the story are invented.</a:t>
+              <a:t>Audio: synthetic voices, computer-generated (Chatterbox TTS cloned from Kokoro-82M reference clips). No recordings of real people. The names and the story are invented.</a:t>
             </a:r>
           </a:p>
           <a:p>
@@ -1531,96 +1531,6 @@
           <a:p>
             <a:r>
               <a:t>Picture: Twemoji graphics by Twitter, Inc. and other contributors (https://github.com/jdecked/twemoji), CC BY 4.0 (https://creativecommons.org/licenses/by/4.0/); resized and combined, with drawings (a river, a rope, a photo frame, bodies) and labels (images/CREDITS.md).</a:t>
-            </a:r>
-          </a:p>
-          <a:p>
-            <a:r>
-              <a:t>Listening script (the audio is coming soon; until then, read it aloud with a volunteer at a normal, friendly speed):</a:t>
-            </a:r>
-          </a:p>
-          <a:p>
-            <a:r>
-              <a:t>Narrator: Lesson three. Listening. Daniel and his mother, Teresa, are looking at an old photo. Listen.</a:t>
-            </a:r>
-          </a:p>
-          <a:p>
-            <a:r>
-              <a:t>Daniel: Mom, is this you in the photo?</a:t>
-            </a:r>
-          </a:p>
-          <a:p>
-            <a:r>
-              <a:t>Teresa: Yes! That's me with my sister. We used to live in a small village.</a:t>
-            </a:r>
-          </a:p>
-          <a:p>
-            <a:r>
-              <a:t>Daniel: Is that your house?</a:t>
-            </a:r>
-          </a:p>
-          <a:p>
-            <a:r>
-              <a:t>Teresa: Yes. We used to live on a farm near a river.</a:t>
-            </a:r>
-          </a:p>
-          <a:p>
-            <a:r>
-              <a:t>Daniel: Did you use to help on the farm?</a:t>
-            </a:r>
-          </a:p>
-          <a:p>
-            <a:r>
-              <a:t>Teresa: Yes, I did. Every morning, I used to feed the animals before school.</a:t>
-            </a:r>
-          </a:p>
-          <a:p>
-            <a:r>
-              <a:t>Daniel: Wow. Did you use to walk to school?</a:t>
-            </a:r>
-          </a:p>
-          <a:p>
-            <a:r>
-              <a:t>Teresa: Yes. It was far, so we used to walk for an hour.</a:t>
-            </a:r>
-          </a:p>
-          <a:p>
-            <a:r>
-              <a:t>Daniel: What did you do after school?</a:t>
-            </a:r>
-          </a:p>
-          <a:p>
-            <a:r>
-              <a:t>Teresa: We used to do our chores. Then we used to climb trees and swim in the river.</a:t>
-            </a:r>
-          </a:p>
-          <a:p>
-            <a:r>
-              <a:t>Daniel: Did you have a TV?</a:t>
-            </a:r>
-          </a:p>
-          <a:p>
-            <a:r>
-              <a:t>Teresa: No, we didn't use to have a TV. We used to listen to the radio at night.</a:t>
-            </a:r>
-          </a:p>
-          <a:p>
-            <a:r>
-              <a:t>Daniel: And did you have a phone?</a:t>
-            </a:r>
-          </a:p>
-          <a:p>
-            <a:r>
-              <a:t>Teresa: No. We used to write letters to my aunt in the city. Now I send you text messages every day!</a:t>
-            </a:r>
-          </a:p>
-          <a:p>
-            <a:r>
-              <a:t>Daniel: That's true. Life is really different now.</a:t>
-            </a:r>
-          </a:p>
-          <a:p>
-            <a:r>
-              <a:t>Narrator: That's the end of the listening.</a:t>
             </a:r>
           </a:p>
         </p:txBody>
@@ -2555,7 +2465,7 @@
           </a:p>
           <a:p>
             <a:r>
-              <a:t>Audio: the listening audio for this lesson (about 1:20) is coming soon. It will use computer-generated voices (Chatterbox TTS cloned from synthetic Kokoro-82M reference clips); no recordings of real people. Until it is ready, read the listening script (in the notes of the Before You Listen slide) with a volunteer. The names and the story are invented.</a:t>
+              <a:t>Audio: synthetic voices, computer-generated (Chatterbox TTS cloned from Kokoro-82M reference clips). No recordings of real people. The names and the story are invented.</a:t>
             </a:r>
           </a:p>
           <a:p>
@@ -12376,7 +12286,7 @@
                 <a:ea typeface="Lexend Deca" pitchFamily="34" charset="-122"/>
                 <a:cs typeface="Lexend Deca" pitchFamily="34" charset="-120"/>
               </a:rPr>
-              <a:t>Audio: about 1:20. It plays once.</a:t>
+              <a:t>Audio: about 1:15. It plays once.</a:t>
             </a:r>
             <a:endParaRPr lang="en-US" sz="2200" dirty="0"/>
           </a:p>
@@ -31479,7 +31389,7 @@
                 <a:ea typeface="Lexend Deca" pitchFamily="34" charset="-122"/>
                 <a:cs typeface="Lexend Deca" pitchFamily="34" charset="-120"/>
               </a:rPr>
-              <a:t>Audio (coming soon): synthetic voices made with Chatterbox TTS (MIT License), cloned from short synthetic reference clips made with Kokoro-82M (Apache License 2.0). No recordings of real people. Each file will carry an inaudible Perth watermark marking it as AI-generated. Font: Lexend Deca (OFL 1.1).</a:t>
+              <a:t>Audio: synthetic voices made with Chatterbox TTS (MIT License), cloned from short synthetic reference clips made with Kokoro-82M (Apache License 2.0). No recordings of real people were used. Each file carries an inaudible Perth watermark marking it as AI-generated. Font: Lexend Deca (OFL 1.1).</a:t>
             </a:r>
             <a:endParaRPr lang="en-US" sz="1350" dirty="0" b="0"/>
           </a:p>
